--- a/output/doc/user-flow-decks/09-engagement-reporting-and-transaction-review.pptx
+++ b/output/doc/user-flow-decks/09-engagement-reporting-and-transaction-review.pptx
@@ -3363,7 +3363,7 @@
                 </a:solidFill>
                 <a:latin typeface="Aptos"/>
               </a:rPr>
-              <a:t>Generated: 2026-04-11</a:t>
+              <a:t>Generated: 2026-04-23</a:t>
             </a:r>
           </a:p>
         </p:txBody>
@@ -4097,6 +4097,18 @@
                 </a:solidFill>
                 <a:latin typeface="Aptos"/>
               </a:rPr>
+              <a:t>The report header exposes both a collateral filter and visible `Reset` and `Download CSV` controls.</a:t>
+            </a:r>
+          </a:p>
+          <a:p>
+            <a:pPr algn="l"/>
+            <a:r>
+              <a:rPr sz="1800">
+                <a:solidFill>
+                  <a:srgbClr val="102A43"/>
+                </a:solidFill>
+                <a:latin typeface="Aptos"/>
+              </a:rPr>
               <a:t>The collateral filter narrows the view when stakeholders want to discuss one asset at a time.</a:t>
             </a:r>
           </a:p>
@@ -4121,7 +4133,7 @@
                 </a:solidFill>
                 <a:latin typeface="Aptos"/>
               </a:rPr>
-              <a:t>The doctor table is the operational follow-up surface for identifying which doctors engaged and how far they got.</a:t>
+              <a:t>The doctor table is the operational follow-up surface for identifying which doctors engaged and how far they got, and it includes client-side search plus a status filter.</a:t>
             </a:r>
           </a:p>
         </p:txBody>
@@ -4401,7 +4413,7 @@
         <p:spPr>
           <a:xfrm>
             <a:off x="749808" y="1097280"/>
-            <a:ext cx="4023360" cy="256032"/>
+            <a:ext cx="3931920" cy="4754880"/>
           </a:xfrm>
           <a:prstGeom prst="rect">
             <a:avLst/>
@@ -4409,12 +4421,19 @@
           <a:noFill/>
         </p:spPr>
         <p:txBody>
-          <a:bodyPr wrap="square" anchor="t">
+          <a:bodyPr wrap="square" lIns="0" rIns="0" tIns="0" bIns="0">
             <a:spAutoFit/>
           </a:bodyPr>
           <a:lstStyle/>
           <a:p>
-            <a:pPr algn="l"/>
+            <a:pPr algn="l">
+              <a:spcBef>
+                <a:spcPts val="0"/>
+              </a:spcBef>
+              <a:spcAft>
+                <a:spcPts val="200"/>
+              </a:spcAft>
+            </a:pPr>
             <a:r>
               <a:rPr sz="1200" b="1">
                 <a:solidFill>
@@ -4425,33 +4444,20 @@
               <a:t>User action</a:t>
             </a:r>
           </a:p>
-        </p:txBody>
-      </p:sp>
-      <p:sp>
-        <p:nvSpPr>
-          <p:cNvPr id="8" name="TextBox 7"/>
-          <p:cNvSpPr txBox="1"/>
-          <p:nvPr/>
-        </p:nvSpPr>
-        <p:spPr>
-          <a:xfrm>
-            <a:off x="749808" y="1353312"/>
-            <a:ext cx="3931920" cy="621792"/>
-          </a:xfrm>
-          <a:prstGeom prst="rect">
-            <a:avLst/>
-          </a:prstGeom>
-          <a:noFill/>
-        </p:spPr>
-        <p:txBody>
-          <a:bodyPr wrap="square" anchor="t">
-            <a:spAutoFit/>
-          </a:bodyPr>
-          <a:lstStyle/>
-          <a:p>
-            <a:pPr algn="l"/>
-            <a:r>
-              <a:rPr sz="1600" b="0">
+          <a:p>
+            <a:pPr algn="l">
+              <a:lnSpc>
+                <a:spcPct val="110000"/>
+              </a:lnSpc>
+              <a:spcBef>
+                <a:spcPts val="0"/>
+              </a:spcBef>
+              <a:spcAft>
+                <a:spcPts val="800"/>
+              </a:spcAft>
+            </a:pPr>
+            <a:r>
+              <a:rPr sz="1300">
                 <a:solidFill>
                   <a:srgbClr val="102A43"/>
                 </a:solidFill>
@@ -4460,31 +4466,15 @@
               <a:t>Navigate directly to the report URL for the campaign.</a:t>
             </a:r>
           </a:p>
-        </p:txBody>
-      </p:sp>
-      <p:sp>
-        <p:nvSpPr>
-          <p:cNvPr id="9" name="TextBox 8"/>
-          <p:cNvSpPr txBox="1"/>
-          <p:nvPr/>
-        </p:nvSpPr>
-        <p:spPr>
-          <a:xfrm>
-            <a:off x="749808" y="2011680"/>
-            <a:ext cx="4023360" cy="256032"/>
-          </a:xfrm>
-          <a:prstGeom prst="rect">
-            <a:avLst/>
-          </a:prstGeom>
-          <a:noFill/>
-        </p:spPr>
-        <p:txBody>
-          <a:bodyPr wrap="square" anchor="t">
-            <a:spAutoFit/>
-          </a:bodyPr>
-          <a:lstStyle/>
-          <a:p>
-            <a:pPr algn="l"/>
+          <a:p>
+            <a:pPr algn="l">
+              <a:spcBef>
+                <a:spcPts val="0"/>
+              </a:spcBef>
+              <a:spcAft>
+                <a:spcPts val="200"/>
+              </a:spcAft>
+            </a:pPr>
             <a:r>
               <a:rPr sz="1200" b="1">
                 <a:solidFill>
@@ -4495,66 +4485,37 @@
               <a:t>What appears on screen</a:t>
             </a:r>
           </a:p>
-        </p:txBody>
-      </p:sp>
-      <p:sp>
-        <p:nvSpPr>
-          <p:cNvPr id="10" name="TextBox 9"/>
-          <p:cNvSpPr txBox="1"/>
-          <p:nvPr/>
-        </p:nvSpPr>
-        <p:spPr>
-          <a:xfrm>
-            <a:off x="749808" y="2267712"/>
-            <a:ext cx="3931920" cy="713232"/>
-          </a:xfrm>
-          <a:prstGeom prst="rect">
-            <a:avLst/>
-          </a:prstGeom>
-          <a:noFill/>
-        </p:spPr>
-        <p:txBody>
-          <a:bodyPr wrap="square" anchor="t">
-            <a:spAutoFit/>
-          </a:bodyPr>
-          <a:lstStyle/>
-          <a:p>
-            <a:pPr algn="l"/>
-            <a:r>
-              <a:rPr sz="1600" b="0">
+          <a:p>
+            <a:pPr algn="l">
+              <a:lnSpc>
+                <a:spcPct val="110000"/>
+              </a:lnSpc>
+              <a:spcBef>
+                <a:spcPts val="0"/>
+              </a:spcBef>
+              <a:spcAft>
+                <a:spcPts val="800"/>
+              </a:spcAft>
+            </a:pPr>
+            <a:r>
+              <a:rPr sz="1300">
                 <a:solidFill>
                   <a:srgbClr val="102A43"/>
                 </a:solidFill>
                 <a:latin typeface="Aptos"/>
               </a:rPr>
-              <a:t>A branded reporting page with a campaign selector, collateral filter, summary section, and doctor table.</a:t>
-            </a:r>
-          </a:p>
-        </p:txBody>
-      </p:sp>
-      <p:sp>
-        <p:nvSpPr>
-          <p:cNvPr id="11" name="TextBox 10"/>
-          <p:cNvSpPr txBox="1"/>
-          <p:nvPr/>
-        </p:nvSpPr>
-        <p:spPr>
-          <a:xfrm>
-            <a:off x="749808" y="3063240"/>
-            <a:ext cx="4023360" cy="256032"/>
-          </a:xfrm>
-          <a:prstGeom prst="rect">
-            <a:avLst/>
-          </a:prstGeom>
-          <a:noFill/>
-        </p:spPr>
-        <p:txBody>
-          <a:bodyPr wrap="square" anchor="t">
-            <a:spAutoFit/>
-          </a:bodyPr>
-          <a:lstStyle/>
-          <a:p>
-            <a:pPr algn="l"/>
+              <a:t>A branded reporting page with a campaign selector, collateral filter, summary section, doctor table, and visible `Reset` and `Download CSV` controls.</a:t>
+            </a:r>
+          </a:p>
+          <a:p>
+            <a:pPr algn="l">
+              <a:spcBef>
+                <a:spcPts val="0"/>
+              </a:spcBef>
+              <a:spcAft>
+                <a:spcPts val="200"/>
+              </a:spcAft>
+            </a:pPr>
             <a:r>
               <a:rPr sz="1200" b="1">
                 <a:solidFill>
@@ -4565,33 +4526,20 @@
               <a:t>Why it matters</a:t>
             </a:r>
           </a:p>
-        </p:txBody>
-      </p:sp>
-      <p:sp>
-        <p:nvSpPr>
-          <p:cNvPr id="12" name="TextBox 11"/>
-          <p:cNvSpPr txBox="1"/>
-          <p:nvPr/>
-        </p:nvSpPr>
-        <p:spPr>
-          <a:xfrm>
-            <a:off x="749808" y="3319272"/>
-            <a:ext cx="3931920" cy="640080"/>
-          </a:xfrm>
-          <a:prstGeom prst="rect">
-            <a:avLst/>
-          </a:prstGeom>
-          <a:noFill/>
-        </p:spPr>
-        <p:txBody>
-          <a:bodyPr wrap="square" anchor="t">
-            <a:spAutoFit/>
-          </a:bodyPr>
-          <a:lstStyle/>
-          <a:p>
-            <a:pPr algn="l"/>
-            <a:r>
-              <a:rPr sz="1500" b="0">
+          <a:p>
+            <a:pPr algn="l">
+              <a:lnSpc>
+                <a:spcPct val="110000"/>
+              </a:lnSpc>
+              <a:spcBef>
+                <a:spcPts val="0"/>
+              </a:spcBef>
+              <a:spcAft>
+                <a:spcPts val="800"/>
+              </a:spcAft>
+            </a:pPr>
+            <a:r>
+              <a:rPr sz="1300">
                 <a:solidFill>
                   <a:srgbClr val="102A43"/>
                 </a:solidFill>
@@ -4600,31 +4548,15 @@
               <a:t>This is the clearest operational view of whether the campaign is generating meaningful doctor interaction.</a:t>
             </a:r>
           </a:p>
-        </p:txBody>
-      </p:sp>
-      <p:sp>
-        <p:nvSpPr>
-          <p:cNvPr id="13" name="TextBox 12"/>
-          <p:cNvSpPr txBox="1"/>
-          <p:nvPr/>
-        </p:nvSpPr>
-        <p:spPr>
-          <a:xfrm>
-            <a:off x="749808" y="4069080"/>
-            <a:ext cx="4023360" cy="256032"/>
-          </a:xfrm>
-          <a:prstGeom prst="rect">
-            <a:avLst/>
-          </a:prstGeom>
-          <a:noFill/>
-        </p:spPr>
-        <p:txBody>
-          <a:bodyPr wrap="square" anchor="t">
-            <a:spAutoFit/>
-          </a:bodyPr>
-          <a:lstStyle/>
-          <a:p>
-            <a:pPr algn="l"/>
+          <a:p>
+            <a:pPr algn="l">
+              <a:spcBef>
+                <a:spcPts val="0"/>
+              </a:spcBef>
+              <a:spcAft>
+                <a:spcPts val="200"/>
+              </a:spcAft>
+            </a:pPr>
             <a:r>
               <a:rPr sz="1200" b="1">
                 <a:solidFill>
@@ -4635,33 +4567,20 @@
               <a:t>Expected result</a:t>
             </a:r>
           </a:p>
-        </p:txBody>
-      </p:sp>
-      <p:sp>
-        <p:nvSpPr>
-          <p:cNvPr id="14" name="TextBox 13"/>
-          <p:cNvSpPr txBox="1"/>
-          <p:nvPr/>
-        </p:nvSpPr>
-        <p:spPr>
-          <a:xfrm>
-            <a:off x="749808" y="4325112"/>
-            <a:ext cx="3931920" cy="566928"/>
-          </a:xfrm>
-          <a:prstGeom prst="rect">
-            <a:avLst/>
-          </a:prstGeom>
-          <a:noFill/>
-        </p:spPr>
-        <p:txBody>
-          <a:bodyPr wrap="square" anchor="t">
-            <a:spAutoFit/>
-          </a:bodyPr>
-          <a:lstStyle/>
-          <a:p>
-            <a:pPr algn="l"/>
-            <a:r>
-              <a:rPr sz="1500" b="0">
+          <a:p>
+            <a:pPr algn="l">
+              <a:lnSpc>
+                <a:spcPct val="110000"/>
+              </a:lnSpc>
+              <a:spcBef>
+                <a:spcPts val="0"/>
+              </a:spcBef>
+              <a:spcAft>
+                <a:spcPts val="800"/>
+              </a:spcAft>
+            </a:pPr>
+            <a:r>
+              <a:rPr sz="1300">
                 <a:solidFill>
                   <a:srgbClr val="102A43"/>
                 </a:solidFill>
@@ -4670,31 +4589,15 @@
               <a:t>Stakeholders can immediately orient to the campaign and available collateral.</a:t>
             </a:r>
           </a:p>
-        </p:txBody>
-      </p:sp>
-      <p:sp>
-        <p:nvSpPr>
-          <p:cNvPr id="15" name="TextBox 14"/>
-          <p:cNvSpPr txBox="1"/>
-          <p:nvPr/>
-        </p:nvSpPr>
-        <p:spPr>
-          <a:xfrm>
-            <a:off x="749808" y="4965192"/>
-            <a:ext cx="4023360" cy="256032"/>
-          </a:xfrm>
-          <a:prstGeom prst="rect">
-            <a:avLst/>
-          </a:prstGeom>
-          <a:noFill/>
-        </p:spPr>
-        <p:txBody>
-          <a:bodyPr wrap="square" anchor="t">
-            <a:spAutoFit/>
-          </a:bodyPr>
-          <a:lstStyle/>
-          <a:p>
-            <a:pPr algn="l"/>
+          <a:p>
+            <a:pPr algn="l">
+              <a:spcBef>
+                <a:spcPts val="0"/>
+              </a:spcBef>
+              <a:spcAft>
+                <a:spcPts val="200"/>
+              </a:spcAft>
+            </a:pPr>
             <a:r>
               <a:rPr sz="1200" b="1">
                 <a:solidFill>
@@ -4705,33 +4608,20 @@
               <a:t>Trainer note</a:t>
             </a:r>
           </a:p>
-        </p:txBody>
-      </p:sp>
-      <p:sp>
-        <p:nvSpPr>
-          <p:cNvPr id="16" name="TextBox 15"/>
-          <p:cNvSpPr txBox="1"/>
-          <p:nvPr/>
-        </p:nvSpPr>
-        <p:spPr>
-          <a:xfrm>
-            <a:off x="749808" y="5212080"/>
-            <a:ext cx="3931920" cy="640080"/>
-          </a:xfrm>
-          <a:prstGeom prst="rect">
-            <a:avLst/>
-          </a:prstGeom>
-          <a:noFill/>
-        </p:spPr>
-        <p:txBody>
-          <a:bodyPr wrap="square" anchor="t">
-            <a:spAutoFit/>
-          </a:bodyPr>
-          <a:lstStyle/>
-          <a:p>
-            <a:pPr algn="l"/>
-            <a:r>
-              <a:rPr sz="1300" b="0">
+          <a:p>
+            <a:pPr algn="l">
+              <a:lnSpc>
+                <a:spcPct val="110000"/>
+              </a:lnSpc>
+              <a:spcBef>
+                <a:spcPts val="0"/>
+              </a:spcBef>
+              <a:spcAft>
+                <a:spcPts val="0"/>
+              </a:spcAft>
+            </a:pPr>
+            <a:r>
+              <a:rPr sz="1200">
                 <a:solidFill>
                   <a:srgbClr val="52667A"/>
                 </a:solidFill>
@@ -4744,7 +4634,7 @@
       </p:sp>
       <p:sp>
         <p:nvSpPr>
-          <p:cNvPr id="17" name="Rounded Rectangle 16"/>
+          <p:cNvPr id="8" name="Rounded Rectangle 7"/>
           <p:cNvSpPr/>
           <p:nvPr/>
         </p:nvSpPr>
@@ -4789,7 +4679,7 @@
       </p:sp>
       <p:sp>
         <p:nvSpPr>
-          <p:cNvPr id="18" name="TextBox 17"/>
+          <p:cNvPr id="9" name="TextBox 8"/>
           <p:cNvSpPr txBox="1"/>
           <p:nvPr/>
         </p:nvSpPr>
@@ -4824,7 +4714,7 @@
       </p:sp>
       <p:pic>
         <p:nvPicPr>
-          <p:cNvPr id="19" name="Picture 18" descr="report-dashboard.png"/>
+          <p:cNvPr id="10" name="Picture 9" descr="report-dashboard.png"/>
           <p:cNvPicPr>
             <a:picLocks noChangeAspect="1"/>
           </p:cNvPicPr>
@@ -4848,7 +4738,7 @@
       </p:pic>
       <p:sp>
         <p:nvSpPr>
-          <p:cNvPr id="20" name="TextBox 19"/>
+          <p:cNvPr id="11" name="TextBox 10"/>
           <p:cNvSpPr txBox="1"/>
           <p:nvPr/>
         </p:nvSpPr>
@@ -4883,7 +4773,7 @@
       </p:sp>
       <p:sp>
         <p:nvSpPr>
-          <p:cNvPr id="21" name="TextBox 20"/>
+          <p:cNvPr id="12" name="TextBox 11"/>
           <p:cNvSpPr txBox="1"/>
           <p:nvPr/>
         </p:nvSpPr>
@@ -5156,7 +5046,7 @@
         <p:spPr>
           <a:xfrm>
             <a:off x="749808" y="1097280"/>
-            <a:ext cx="4023360" cy="256032"/>
+            <a:ext cx="3931920" cy="4754880"/>
           </a:xfrm>
           <a:prstGeom prst="rect">
             <a:avLst/>
@@ -5164,12 +5054,19 @@
           <a:noFill/>
         </p:spPr>
         <p:txBody>
-          <a:bodyPr wrap="square" anchor="t">
+          <a:bodyPr wrap="square" lIns="0" rIns="0" tIns="0" bIns="0">
             <a:spAutoFit/>
           </a:bodyPr>
           <a:lstStyle/>
           <a:p>
-            <a:pPr algn="l"/>
+            <a:pPr algn="l">
+              <a:spcBef>
+                <a:spcPts val="0"/>
+              </a:spcBef>
+              <a:spcAft>
+                <a:spcPts val="200"/>
+              </a:spcAft>
+            </a:pPr>
             <a:r>
               <a:rPr sz="1200" b="1">
                 <a:solidFill>
@@ -5180,33 +5077,20 @@
               <a:t>User action</a:t>
             </a:r>
           </a:p>
-        </p:txBody>
-      </p:sp>
-      <p:sp>
-        <p:nvSpPr>
-          <p:cNvPr id="8" name="TextBox 7"/>
-          <p:cNvSpPr txBox="1"/>
-          <p:nvPr/>
-        </p:nvSpPr>
-        <p:spPr>
-          <a:xfrm>
-            <a:off x="749808" y="1353312"/>
-            <a:ext cx="3931920" cy="621792"/>
-          </a:xfrm>
-          <a:prstGeom prst="rect">
-            <a:avLst/>
-          </a:prstGeom>
-          <a:noFill/>
-        </p:spPr>
-        <p:txBody>
-          <a:bodyPr wrap="square" anchor="t">
-            <a:spAutoFit/>
-          </a:bodyPr>
-          <a:lstStyle/>
-          <a:p>
-            <a:pPr algn="l"/>
-            <a:r>
-              <a:rPr sz="1600" b="0">
+          <a:p>
+            <a:pPr algn="l">
+              <a:lnSpc>
+                <a:spcPct val="110000"/>
+              </a:lnSpc>
+              <a:spcBef>
+                <a:spcPts val="0"/>
+              </a:spcBef>
+              <a:spcAft>
+                <a:spcPts val="800"/>
+              </a:spcAft>
+            </a:pPr>
+            <a:r>
+              <a:rPr sz="1300">
                 <a:solidFill>
                   <a:srgbClr val="102A43"/>
                 </a:solidFill>
@@ -5215,31 +5099,15 @@
               <a:t>Choose a collateral from the drop-down and refresh the page context.</a:t>
             </a:r>
           </a:p>
-        </p:txBody>
-      </p:sp>
-      <p:sp>
-        <p:nvSpPr>
-          <p:cNvPr id="9" name="TextBox 8"/>
-          <p:cNvSpPr txBox="1"/>
-          <p:nvPr/>
-        </p:nvSpPr>
-        <p:spPr>
-          <a:xfrm>
-            <a:off x="749808" y="2011680"/>
-            <a:ext cx="4023360" cy="256032"/>
-          </a:xfrm>
-          <a:prstGeom prst="rect">
-            <a:avLst/>
-          </a:prstGeom>
-          <a:noFill/>
-        </p:spPr>
-        <p:txBody>
-          <a:bodyPr wrap="square" anchor="t">
-            <a:spAutoFit/>
-          </a:bodyPr>
-          <a:lstStyle/>
-          <a:p>
-            <a:pPr algn="l"/>
+          <a:p>
+            <a:pPr algn="l">
+              <a:spcBef>
+                <a:spcPts val="0"/>
+              </a:spcBef>
+              <a:spcAft>
+                <a:spcPts val="200"/>
+              </a:spcAft>
+            </a:pPr>
             <a:r>
               <a:rPr sz="1200" b="1">
                 <a:solidFill>
@@ -5250,66 +5118,37 @@
               <a:t>What appears on screen</a:t>
             </a:r>
           </a:p>
-        </p:txBody>
-      </p:sp>
-      <p:sp>
-        <p:nvSpPr>
-          <p:cNvPr id="10" name="TextBox 9"/>
-          <p:cNvSpPr txBox="1"/>
-          <p:nvPr/>
-        </p:nvSpPr>
-        <p:spPr>
-          <a:xfrm>
-            <a:off x="749808" y="2267712"/>
-            <a:ext cx="3931920" cy="713232"/>
-          </a:xfrm>
-          <a:prstGeom prst="rect">
-            <a:avLst/>
-          </a:prstGeom>
-          <a:noFill/>
-        </p:spPr>
-        <p:txBody>
-          <a:bodyPr wrap="square" anchor="t">
-            <a:spAutoFit/>
-          </a:bodyPr>
-          <a:lstStyle/>
-          <a:p>
-            <a:pPr algn="l"/>
-            <a:r>
-              <a:rPr sz="1600" b="0">
+          <a:p>
+            <a:pPr algn="l">
+              <a:lnSpc>
+                <a:spcPct val="110000"/>
+              </a:lnSpc>
+              <a:spcBef>
+                <a:spcPts val="0"/>
+              </a:spcBef>
+              <a:spcAft>
+                <a:spcPts val="800"/>
+              </a:spcAft>
+            </a:pPr>
+            <a:r>
+              <a:rPr sz="1300">
                 <a:solidFill>
                   <a:srgbClr val="102A43"/>
                 </a:solidFill>
                 <a:latin typeface="Aptos"/>
               </a:rPr>
-              <a:t>The same dashboard narrowed to a single collateral's doctor outcomes.</a:t>
-            </a:r>
-          </a:p>
-        </p:txBody>
-      </p:sp>
-      <p:sp>
-        <p:nvSpPr>
-          <p:cNvPr id="11" name="TextBox 10"/>
-          <p:cNvSpPr txBox="1"/>
-          <p:nvPr/>
-        </p:nvSpPr>
-        <p:spPr>
-          <a:xfrm>
-            <a:off x="749808" y="3063240"/>
-            <a:ext cx="4023360" cy="256032"/>
-          </a:xfrm>
-          <a:prstGeom prst="rect">
-            <a:avLst/>
-          </a:prstGeom>
-          <a:noFill/>
-        </p:spPr>
-        <p:txBody>
-          <a:bodyPr wrap="square" anchor="t">
-            <a:spAutoFit/>
-          </a:bodyPr>
-          <a:lstStyle/>
-          <a:p>
-            <a:pPr algn="l"/>
+              <a:t>The same dashboard narrowed to a single collateral's doctor outcomes, with the summary counters and doctor rows recalculated for that asset.</a:t>
+            </a:r>
+          </a:p>
+          <a:p>
+            <a:pPr algn="l">
+              <a:spcBef>
+                <a:spcPts val="0"/>
+              </a:spcBef>
+              <a:spcAft>
+                <a:spcPts val="200"/>
+              </a:spcAft>
+            </a:pPr>
             <a:r>
               <a:rPr sz="1200" b="1">
                 <a:solidFill>
@@ -5320,33 +5159,20 @@
               <a:t>Why it matters</a:t>
             </a:r>
           </a:p>
-        </p:txBody>
-      </p:sp>
-      <p:sp>
-        <p:nvSpPr>
-          <p:cNvPr id="12" name="TextBox 11"/>
-          <p:cNvSpPr txBox="1"/>
-          <p:nvPr/>
-        </p:nvSpPr>
-        <p:spPr>
-          <a:xfrm>
-            <a:off x="749808" y="3319272"/>
-            <a:ext cx="3931920" cy="640080"/>
-          </a:xfrm>
-          <a:prstGeom prst="rect">
-            <a:avLst/>
-          </a:prstGeom>
-          <a:noFill/>
-        </p:spPr>
-        <p:txBody>
-          <a:bodyPr wrap="square" anchor="t">
-            <a:spAutoFit/>
-          </a:bodyPr>
-          <a:lstStyle/>
-          <a:p>
-            <a:pPr algn="l"/>
-            <a:r>
-              <a:rPr sz="1500" b="0">
+          <a:p>
+            <a:pPr algn="l">
+              <a:lnSpc>
+                <a:spcPct val="110000"/>
+              </a:lnSpc>
+              <a:spcBef>
+                <a:spcPts val="0"/>
+              </a:spcBef>
+              <a:spcAft>
+                <a:spcPts val="800"/>
+              </a:spcAft>
+            </a:pPr>
+            <a:r>
+              <a:rPr sz="1300">
                 <a:solidFill>
                   <a:srgbClr val="102A43"/>
                 </a:solidFill>
@@ -5355,31 +5181,15 @@
               <a:t>Filtering keeps the conversation concrete when the campaign has more than one asset.</a:t>
             </a:r>
           </a:p>
-        </p:txBody>
-      </p:sp>
-      <p:sp>
-        <p:nvSpPr>
-          <p:cNvPr id="13" name="TextBox 12"/>
-          <p:cNvSpPr txBox="1"/>
-          <p:nvPr/>
-        </p:nvSpPr>
-        <p:spPr>
-          <a:xfrm>
-            <a:off x="749808" y="4069080"/>
-            <a:ext cx="4023360" cy="256032"/>
-          </a:xfrm>
-          <a:prstGeom prst="rect">
-            <a:avLst/>
-          </a:prstGeom>
-          <a:noFill/>
-        </p:spPr>
-        <p:txBody>
-          <a:bodyPr wrap="square" anchor="t">
-            <a:spAutoFit/>
-          </a:bodyPr>
-          <a:lstStyle/>
-          <a:p>
-            <a:pPr algn="l"/>
+          <a:p>
+            <a:pPr algn="l">
+              <a:spcBef>
+                <a:spcPts val="0"/>
+              </a:spcBef>
+              <a:spcAft>
+                <a:spcPts val="200"/>
+              </a:spcAft>
+            </a:pPr>
             <a:r>
               <a:rPr sz="1200" b="1">
                 <a:solidFill>
@@ -5390,33 +5200,20 @@
               <a:t>Expected result</a:t>
             </a:r>
           </a:p>
-        </p:txBody>
-      </p:sp>
-      <p:sp>
-        <p:nvSpPr>
-          <p:cNvPr id="14" name="TextBox 13"/>
-          <p:cNvSpPr txBox="1"/>
-          <p:nvPr/>
-        </p:nvSpPr>
-        <p:spPr>
-          <a:xfrm>
-            <a:off x="749808" y="4325112"/>
-            <a:ext cx="3931920" cy="566928"/>
-          </a:xfrm>
-          <a:prstGeom prst="rect">
-            <a:avLst/>
-          </a:prstGeom>
-          <a:noFill/>
-        </p:spPr>
-        <p:txBody>
-          <a:bodyPr wrap="square" anchor="t">
-            <a:spAutoFit/>
-          </a:bodyPr>
-          <a:lstStyle/>
-          <a:p>
-            <a:pPr algn="l"/>
-            <a:r>
-              <a:rPr sz="1500" b="0">
+          <a:p>
+            <a:pPr algn="l">
+              <a:lnSpc>
+                <a:spcPct val="110000"/>
+              </a:lnSpc>
+              <a:spcBef>
+                <a:spcPts val="0"/>
+              </a:spcBef>
+              <a:spcAft>
+                <a:spcPts val="800"/>
+              </a:spcAft>
+            </a:pPr>
+            <a:r>
+              <a:rPr sz="1300">
                 <a:solidFill>
                   <a:srgbClr val="102A43"/>
                 </a:solidFill>
@@ -5425,31 +5222,15 @@
               <a:t>The summary metrics and doctor rows now reflect the selected collateral only.</a:t>
             </a:r>
           </a:p>
-        </p:txBody>
-      </p:sp>
-      <p:sp>
-        <p:nvSpPr>
-          <p:cNvPr id="15" name="TextBox 14"/>
-          <p:cNvSpPr txBox="1"/>
-          <p:nvPr/>
-        </p:nvSpPr>
-        <p:spPr>
-          <a:xfrm>
-            <a:off x="749808" y="4965192"/>
-            <a:ext cx="4023360" cy="256032"/>
-          </a:xfrm>
-          <a:prstGeom prst="rect">
-            <a:avLst/>
-          </a:prstGeom>
-          <a:noFill/>
-        </p:spPr>
-        <p:txBody>
-          <a:bodyPr wrap="square" anchor="t">
-            <a:spAutoFit/>
-          </a:bodyPr>
-          <a:lstStyle/>
-          <a:p>
-            <a:pPr algn="l"/>
+          <a:p>
+            <a:pPr algn="l">
+              <a:spcBef>
+                <a:spcPts val="0"/>
+              </a:spcBef>
+              <a:spcAft>
+                <a:spcPts val="200"/>
+              </a:spcAft>
+            </a:pPr>
             <a:r>
               <a:rPr sz="1200" b="1">
                 <a:solidFill>
@@ -5460,33 +5241,20 @@
               <a:t>Trainer note</a:t>
             </a:r>
           </a:p>
-        </p:txBody>
-      </p:sp>
-      <p:sp>
-        <p:nvSpPr>
-          <p:cNvPr id="16" name="TextBox 15"/>
-          <p:cNvSpPr txBox="1"/>
-          <p:nvPr/>
-        </p:nvSpPr>
-        <p:spPr>
-          <a:xfrm>
-            <a:off x="749808" y="5212080"/>
-            <a:ext cx="3931920" cy="640080"/>
-          </a:xfrm>
-          <a:prstGeom prst="rect">
-            <a:avLst/>
-          </a:prstGeom>
-          <a:noFill/>
-        </p:spPr>
-        <p:txBody>
-          <a:bodyPr wrap="square" anchor="t">
-            <a:spAutoFit/>
-          </a:bodyPr>
-          <a:lstStyle/>
-          <a:p>
-            <a:pPr algn="l"/>
-            <a:r>
-              <a:rPr sz="1300" b="0">
+          <a:p>
+            <a:pPr algn="l">
+              <a:lnSpc>
+                <a:spcPct val="110000"/>
+              </a:lnSpc>
+              <a:spcBef>
+                <a:spcPts val="0"/>
+              </a:spcBef>
+              <a:spcAft>
+                <a:spcPts val="0"/>
+              </a:spcAft>
+            </a:pPr>
+            <a:r>
+              <a:rPr sz="1200">
                 <a:solidFill>
                   <a:srgbClr val="52667A"/>
                 </a:solidFill>
@@ -5499,7 +5267,7 @@
       </p:sp>
       <p:sp>
         <p:nvSpPr>
-          <p:cNvPr id="17" name="Rounded Rectangle 16"/>
+          <p:cNvPr id="8" name="Rounded Rectangle 7"/>
           <p:cNvSpPr/>
           <p:nvPr/>
         </p:nvSpPr>
@@ -5544,7 +5312,7 @@
       </p:sp>
       <p:sp>
         <p:nvSpPr>
-          <p:cNvPr id="18" name="TextBox 17"/>
+          <p:cNvPr id="9" name="TextBox 8"/>
           <p:cNvSpPr txBox="1"/>
           <p:nvPr/>
         </p:nvSpPr>
@@ -5579,7 +5347,7 @@
       </p:sp>
       <p:pic>
         <p:nvPicPr>
-          <p:cNvPr id="19" name="Picture 18" descr="report-filtered.png"/>
+          <p:cNvPr id="10" name="Picture 9" descr="report-filtered.png"/>
           <p:cNvPicPr>
             <a:picLocks noChangeAspect="1"/>
           </p:cNvPicPr>
@@ -5603,7 +5371,7 @@
       </p:pic>
       <p:sp>
         <p:nvSpPr>
-          <p:cNvPr id="20" name="TextBox 19"/>
+          <p:cNvPr id="11" name="TextBox 10"/>
           <p:cNvSpPr txBox="1"/>
           <p:nvPr/>
         </p:nvSpPr>
@@ -5638,7 +5406,7 @@
       </p:sp>
       <p:sp>
         <p:nvSpPr>
-          <p:cNvPr id="21" name="TextBox 20"/>
+          <p:cNvPr id="12" name="TextBox 11"/>
           <p:cNvSpPr txBox="1"/>
           <p:nvPr/>
         </p:nvSpPr>
@@ -5911,7 +5679,7 @@
         <p:spPr>
           <a:xfrm>
             <a:off x="749808" y="1097280"/>
-            <a:ext cx="4023360" cy="256032"/>
+            <a:ext cx="3931920" cy="4754880"/>
           </a:xfrm>
           <a:prstGeom prst="rect">
             <a:avLst/>
@@ -5919,12 +5687,19 @@
           <a:noFill/>
         </p:spPr>
         <p:txBody>
-          <a:bodyPr wrap="square" anchor="t">
+          <a:bodyPr wrap="square" lIns="0" rIns="0" tIns="0" bIns="0">
             <a:spAutoFit/>
           </a:bodyPr>
           <a:lstStyle/>
           <a:p>
-            <a:pPr algn="l"/>
+            <a:pPr algn="l">
+              <a:spcBef>
+                <a:spcPts val="0"/>
+              </a:spcBef>
+              <a:spcAft>
+                <a:spcPts val="200"/>
+              </a:spcAft>
+            </a:pPr>
             <a:r>
               <a:rPr sz="1200" b="1">
                 <a:solidFill>
@@ -5935,66 +5710,37 @@
               <a:t>User action</a:t>
             </a:r>
           </a:p>
-        </p:txBody>
-      </p:sp>
-      <p:sp>
-        <p:nvSpPr>
-          <p:cNvPr id="8" name="TextBox 7"/>
-          <p:cNvSpPr txBox="1"/>
-          <p:nvPr/>
-        </p:nvSpPr>
-        <p:spPr>
-          <a:xfrm>
-            <a:off x="749808" y="1353312"/>
-            <a:ext cx="3931920" cy="621792"/>
-          </a:xfrm>
-          <a:prstGeom prst="rect">
-            <a:avLst/>
-          </a:prstGeom>
-          <a:noFill/>
-        </p:spPr>
-        <p:txBody>
-          <a:bodyPr wrap="square" anchor="t">
-            <a:spAutoFit/>
-          </a:bodyPr>
-          <a:lstStyle/>
-          <a:p>
-            <a:pPr algn="l"/>
-            <a:r>
-              <a:rPr sz="1600" b="0">
+          <a:p>
+            <a:pPr algn="l">
+              <a:lnSpc>
+                <a:spcPct val="110000"/>
+              </a:lnSpc>
+              <a:spcBef>
+                <a:spcPts val="0"/>
+              </a:spcBef>
+              <a:spcAft>
+                <a:spcPts val="800"/>
+              </a:spcAft>
+            </a:pPr>
+            <a:r>
+              <a:rPr sz="1200">
                 <a:solidFill>
                   <a:srgbClr val="102A43"/>
                 </a:solidFill>
                 <a:latin typeface="Aptos"/>
               </a:rPr>
-              <a:t>Scroll into the doctor rows and inspect who clicked, viewed, downloaded, or reached later video buckets.</a:t>
-            </a:r>
-          </a:p>
-        </p:txBody>
-      </p:sp>
-      <p:sp>
-        <p:nvSpPr>
-          <p:cNvPr id="9" name="TextBox 8"/>
-          <p:cNvSpPr txBox="1"/>
-          <p:nvPr/>
-        </p:nvSpPr>
-        <p:spPr>
-          <a:xfrm>
-            <a:off x="749808" y="2011680"/>
-            <a:ext cx="4023360" cy="256032"/>
-          </a:xfrm>
-          <a:prstGeom prst="rect">
-            <a:avLst/>
-          </a:prstGeom>
-          <a:noFill/>
-        </p:spPr>
-        <p:txBody>
-          <a:bodyPr wrap="square" anchor="t">
-            <a:spAutoFit/>
-          </a:bodyPr>
-          <a:lstStyle/>
-          <a:p>
-            <a:pPr algn="l"/>
+              <a:t>Use the search box and status filter above the table, then inspect who clicked, viewed, downloaded, or reached the later video buckets.</a:t>
+            </a:r>
+          </a:p>
+          <a:p>
+            <a:pPr algn="l">
+              <a:spcBef>
+                <a:spcPts val="0"/>
+              </a:spcBef>
+              <a:spcAft>
+                <a:spcPts val="200"/>
+              </a:spcAft>
+            </a:pPr>
             <a:r>
               <a:rPr sz="1200" b="1">
                 <a:solidFill>
@@ -6005,66 +5751,37 @@
               <a:t>What appears on screen</a:t>
             </a:r>
           </a:p>
-        </p:txBody>
-      </p:sp>
-      <p:sp>
-        <p:nvSpPr>
-          <p:cNvPr id="10" name="TextBox 9"/>
-          <p:cNvSpPr txBox="1"/>
-          <p:nvPr/>
-        </p:nvSpPr>
-        <p:spPr>
-          <a:xfrm>
-            <a:off x="749808" y="2267712"/>
-            <a:ext cx="3931920" cy="713232"/>
-          </a:xfrm>
-          <a:prstGeom prst="rect">
-            <a:avLst/>
-          </a:prstGeom>
-          <a:noFill/>
-        </p:spPr>
-        <p:txBody>
-          <a:bodyPr wrap="square" anchor="t">
-            <a:spAutoFit/>
-          </a:bodyPr>
-          <a:lstStyle/>
-          <a:p>
-            <a:pPr algn="l"/>
-            <a:r>
-              <a:rPr sz="1600" b="0">
+          <a:p>
+            <a:pPr algn="l">
+              <a:lnSpc>
+                <a:spcPct val="110000"/>
+              </a:lnSpc>
+              <a:spcBef>
+                <a:spcPts val="0"/>
+              </a:spcBef>
+              <a:spcAft>
+                <a:spcPts val="800"/>
+              </a:spcAft>
+            </a:pPr>
+            <a:r>
+              <a:rPr sz="1200">
                 <a:solidFill>
                   <a:srgbClr val="102A43"/>
                 </a:solidFill>
                 <a:latin typeface="Aptos"/>
               </a:rPr>
-              <a:t>A doctor table that combines rep identity, doctor number, collateral title, and engagement state.</a:t>
-            </a:r>
-          </a:p>
-        </p:txBody>
-      </p:sp>
-      <p:sp>
-        <p:nvSpPr>
-          <p:cNvPr id="11" name="TextBox 10"/>
-          <p:cNvSpPr txBox="1"/>
-          <p:nvPr/>
-        </p:nvSpPr>
-        <p:spPr>
-          <a:xfrm>
-            <a:off x="749808" y="3063240"/>
-            <a:ext cx="4023360" cy="256032"/>
-          </a:xfrm>
-          <a:prstGeom prst="rect">
-            <a:avLst/>
-          </a:prstGeom>
-          <a:noFill/>
-        </p:spPr>
-        <p:txBody>
-          <a:bodyPr wrap="square" anchor="t">
-            <a:spAutoFit/>
-          </a:bodyPr>
-          <a:lstStyle/>
-          <a:p>
-            <a:pPr algn="l"/>
+              <a:t>A doctor table that combines transaction ID, doctor number, collateral ID, clicked state, PDF progress, video progress, transaction date, and updated timestamp.</a:t>
+            </a:r>
+          </a:p>
+          <a:p>
+            <a:pPr algn="l">
+              <a:spcBef>
+                <a:spcPts val="0"/>
+              </a:spcBef>
+              <a:spcAft>
+                <a:spcPts val="200"/>
+              </a:spcAft>
+            </a:pPr>
             <a:r>
               <a:rPr sz="1200" b="1">
                 <a:solidFill>
@@ -6075,33 +5792,20 @@
               <a:t>Why it matters</a:t>
             </a:r>
           </a:p>
-        </p:txBody>
-      </p:sp>
-      <p:sp>
-        <p:nvSpPr>
-          <p:cNvPr id="12" name="TextBox 11"/>
-          <p:cNvSpPr txBox="1"/>
-          <p:nvPr/>
-        </p:nvSpPr>
-        <p:spPr>
-          <a:xfrm>
-            <a:off x="749808" y="3319272"/>
-            <a:ext cx="3931920" cy="640080"/>
-          </a:xfrm>
-          <a:prstGeom prst="rect">
-            <a:avLst/>
-          </a:prstGeom>
-          <a:noFill/>
-        </p:spPr>
-        <p:txBody>
-          <a:bodyPr wrap="square" anchor="t">
-            <a:spAutoFit/>
-          </a:bodyPr>
-          <a:lstStyle/>
-          <a:p>
-            <a:pPr algn="l"/>
-            <a:r>
-              <a:rPr sz="1500" b="0">
+          <a:p>
+            <a:pPr algn="l">
+              <a:lnSpc>
+                <a:spcPct val="110000"/>
+              </a:lnSpc>
+              <a:spcBef>
+                <a:spcPts val="0"/>
+              </a:spcBef>
+              <a:spcAft>
+                <a:spcPts val="800"/>
+              </a:spcAft>
+            </a:pPr>
+            <a:r>
+              <a:rPr sz="1200">
                 <a:solidFill>
                   <a:srgbClr val="102A43"/>
                 </a:solidFill>
@@ -6110,31 +5814,15 @@
               <a:t>This is the bridge from aggregate counts to real operational follow-up.</a:t>
             </a:r>
           </a:p>
-        </p:txBody>
-      </p:sp>
-      <p:sp>
-        <p:nvSpPr>
-          <p:cNvPr id="13" name="TextBox 12"/>
-          <p:cNvSpPr txBox="1"/>
-          <p:nvPr/>
-        </p:nvSpPr>
-        <p:spPr>
-          <a:xfrm>
-            <a:off x="749808" y="4069080"/>
-            <a:ext cx="4023360" cy="256032"/>
-          </a:xfrm>
-          <a:prstGeom prst="rect">
-            <a:avLst/>
-          </a:prstGeom>
-          <a:noFill/>
-        </p:spPr>
-        <p:txBody>
-          <a:bodyPr wrap="square" anchor="t">
-            <a:spAutoFit/>
-          </a:bodyPr>
-          <a:lstStyle/>
-          <a:p>
-            <a:pPr algn="l"/>
+          <a:p>
+            <a:pPr algn="l">
+              <a:spcBef>
+                <a:spcPts val="0"/>
+              </a:spcBef>
+              <a:spcAft>
+                <a:spcPts val="200"/>
+              </a:spcAft>
+            </a:pPr>
             <a:r>
               <a:rPr sz="1200" b="1">
                 <a:solidFill>
@@ -6145,33 +5833,20 @@
               <a:t>Expected result</a:t>
             </a:r>
           </a:p>
-        </p:txBody>
-      </p:sp>
-      <p:sp>
-        <p:nvSpPr>
-          <p:cNvPr id="14" name="TextBox 13"/>
-          <p:cNvSpPr txBox="1"/>
-          <p:nvPr/>
-        </p:nvSpPr>
-        <p:spPr>
-          <a:xfrm>
-            <a:off x="749808" y="4325112"/>
-            <a:ext cx="3931920" cy="566928"/>
-          </a:xfrm>
-          <a:prstGeom prst="rect">
-            <a:avLst/>
-          </a:prstGeom>
-          <a:noFill/>
-        </p:spPr>
-        <p:txBody>
-          <a:bodyPr wrap="square" anchor="t">
-            <a:spAutoFit/>
-          </a:bodyPr>
-          <a:lstStyle/>
-          <a:p>
-            <a:pPr algn="l"/>
-            <a:r>
-              <a:rPr sz="1500" b="0">
+          <a:p>
+            <a:pPr algn="l">
+              <a:lnSpc>
+                <a:spcPct val="110000"/>
+              </a:lnSpc>
+              <a:spcBef>
+                <a:spcPts val="0"/>
+              </a:spcBef>
+              <a:spcAft>
+                <a:spcPts val="800"/>
+              </a:spcAft>
+            </a:pPr>
+            <a:r>
+              <a:rPr sz="1200">
                 <a:solidFill>
                   <a:srgbClr val="102A43"/>
                 </a:solidFill>
@@ -6180,31 +5855,15 @@
               <a:t>The team can identify which doctors need another touchpoint or a different content approach.</a:t>
             </a:r>
           </a:p>
-        </p:txBody>
-      </p:sp>
-      <p:sp>
-        <p:nvSpPr>
-          <p:cNvPr id="15" name="TextBox 14"/>
-          <p:cNvSpPr txBox="1"/>
-          <p:nvPr/>
-        </p:nvSpPr>
-        <p:spPr>
-          <a:xfrm>
-            <a:off x="749808" y="4965192"/>
-            <a:ext cx="4023360" cy="256032"/>
-          </a:xfrm>
-          <a:prstGeom prst="rect">
-            <a:avLst/>
-          </a:prstGeom>
-          <a:noFill/>
-        </p:spPr>
-        <p:txBody>
-          <a:bodyPr wrap="square" anchor="t">
-            <a:spAutoFit/>
-          </a:bodyPr>
-          <a:lstStyle/>
-          <a:p>
-            <a:pPr algn="l"/>
+          <a:p>
+            <a:pPr algn="l">
+              <a:spcBef>
+                <a:spcPts val="0"/>
+              </a:spcBef>
+              <a:spcAft>
+                <a:spcPts val="200"/>
+              </a:spcAft>
+            </a:pPr>
             <a:r>
               <a:rPr sz="1200" b="1">
                 <a:solidFill>
@@ -6215,46 +5874,33 @@
               <a:t>Trainer note</a:t>
             </a:r>
           </a:p>
-        </p:txBody>
-      </p:sp>
-      <p:sp>
-        <p:nvSpPr>
-          <p:cNvPr id="16" name="TextBox 15"/>
-          <p:cNvSpPr txBox="1"/>
-          <p:nvPr/>
-        </p:nvSpPr>
-        <p:spPr>
-          <a:xfrm>
-            <a:off x="749808" y="5212080"/>
-            <a:ext cx="3931920" cy="640080"/>
-          </a:xfrm>
-          <a:prstGeom prst="rect">
-            <a:avLst/>
-          </a:prstGeom>
-          <a:noFill/>
-        </p:spPr>
-        <p:txBody>
-          <a:bodyPr wrap="square" anchor="t">
-            <a:spAutoFit/>
-          </a:bodyPr>
-          <a:lstStyle/>
-          <a:p>
-            <a:pPr algn="l"/>
-            <a:r>
-              <a:rPr sz="1300" b="0">
+          <a:p>
+            <a:pPr algn="l">
+              <a:lnSpc>
+                <a:spcPct val="110000"/>
+              </a:lnSpc>
+              <a:spcBef>
+                <a:spcPts val="0"/>
+              </a:spcBef>
+              <a:spcAft>
+                <a:spcPts val="0"/>
+              </a:spcAft>
+            </a:pPr>
+            <a:r>
+              <a:rPr sz="1100">
                 <a:solidFill>
                   <a:srgbClr val="52667A"/>
                 </a:solidFill>
                 <a:latin typeface="Aptos"/>
               </a:rPr>
-              <a:t>Use the report right after the doctor-viewer demo so the audience recognizes how those actions appear operationally.</a:t>
-            </a:r>
-          </a:p>
-        </p:txBody>
-      </p:sp>
-      <p:sp>
-        <p:nvSpPr>
-          <p:cNvPr id="17" name="Rounded Rectangle 16"/>
+              <a:t>Use the report right after the doctor-viewer demo so the audience recognizes how those actions appear operationally. The status filter is client-side, so it is safe to use live during training without losing the page state.</a:t>
+            </a:r>
+          </a:p>
+        </p:txBody>
+      </p:sp>
+      <p:sp>
+        <p:nvSpPr>
+          <p:cNvPr id="8" name="Rounded Rectangle 7"/>
           <p:cNvSpPr/>
           <p:nvPr/>
         </p:nvSpPr>
@@ -6299,7 +5945,7 @@
       </p:sp>
       <p:sp>
         <p:nvSpPr>
-          <p:cNvPr id="18" name="TextBox 17"/>
+          <p:cNvPr id="9" name="TextBox 8"/>
           <p:cNvSpPr txBox="1"/>
           <p:nvPr/>
         </p:nvSpPr>
@@ -6334,7 +5980,7 @@
       </p:sp>
       <p:pic>
         <p:nvPicPr>
-          <p:cNvPr id="19" name="Picture 18" descr="report-dashboard.png"/>
+          <p:cNvPr id="10" name="Picture 9" descr="report-dashboard.png"/>
           <p:cNvPicPr>
             <a:picLocks noChangeAspect="1"/>
           </p:cNvPicPr>
@@ -6358,7 +6004,7 @@
       </p:pic>
       <p:sp>
         <p:nvSpPr>
-          <p:cNvPr id="20" name="TextBox 19"/>
+          <p:cNvPr id="11" name="TextBox 10"/>
           <p:cNvSpPr txBox="1"/>
           <p:nvPr/>
         </p:nvSpPr>
@@ -6393,7 +6039,7 @@
       </p:sp>
       <p:sp>
         <p:nvSpPr>
-          <p:cNvPr id="21" name="TextBox 20"/>
+          <p:cNvPr id="12" name="TextBox 11"/>
           <p:cNvSpPr txBox="1"/>
           <p:nvPr/>
         </p:nvSpPr>
@@ -6666,7 +6312,7 @@
         <p:spPr>
           <a:xfrm>
             <a:off x="749808" y="1097280"/>
-            <a:ext cx="4023360" cy="256032"/>
+            <a:ext cx="3931920" cy="4754880"/>
           </a:xfrm>
           <a:prstGeom prst="rect">
             <a:avLst/>
@@ -6674,12 +6320,19 @@
           <a:noFill/>
         </p:spPr>
         <p:txBody>
-          <a:bodyPr wrap="square" anchor="t">
+          <a:bodyPr wrap="square" lIns="0" rIns="0" tIns="0" bIns="0">
             <a:spAutoFit/>
           </a:bodyPr>
           <a:lstStyle/>
           <a:p>
-            <a:pPr algn="l"/>
+            <a:pPr algn="l">
+              <a:spcBef>
+                <a:spcPts val="0"/>
+              </a:spcBef>
+              <a:spcAft>
+                <a:spcPts val="200"/>
+              </a:spcAft>
+            </a:pPr>
             <a:r>
               <a:rPr sz="1200" b="1">
                 <a:solidFill>
@@ -6690,33 +6343,20 @@
               <a:t>User action</a:t>
             </a:r>
           </a:p>
-        </p:txBody>
-      </p:sp>
-      <p:sp>
-        <p:nvSpPr>
-          <p:cNvPr id="8" name="TextBox 7"/>
-          <p:cNvSpPr txBox="1"/>
-          <p:nvPr/>
-        </p:nvSpPr>
-        <p:spPr>
-          <a:xfrm>
-            <a:off x="749808" y="1353312"/>
-            <a:ext cx="3931920" cy="621792"/>
-          </a:xfrm>
-          <a:prstGeom prst="rect">
-            <a:avLst/>
-          </a:prstGeom>
-          <a:noFill/>
-        </p:spPr>
-        <p:txBody>
-          <a:bodyPr wrap="square" anchor="t">
-            <a:spAutoFit/>
-          </a:bodyPr>
-          <a:lstStyle/>
-          <a:p>
-            <a:pPr algn="l"/>
-            <a:r>
-              <a:rPr sz="1600" b="0">
+          <a:p>
+            <a:pPr algn="l">
+              <a:lnSpc>
+                <a:spcPct val="110000"/>
+              </a:lnSpc>
+              <a:spcBef>
+                <a:spcPts val="0"/>
+              </a:spcBef>
+              <a:spcAft>
+                <a:spcPts val="800"/>
+              </a:spcAft>
+            </a:pPr>
+            <a:r>
+              <a:rPr sz="1300">
                 <a:solidFill>
                   <a:srgbClr val="102A43"/>
                 </a:solidFill>
@@ -6725,31 +6365,15 @@
               <a:t>Use the CSV download option and hand the resulting data to downstream reporting or follow-up teams.</a:t>
             </a:r>
           </a:p>
-        </p:txBody>
-      </p:sp>
-      <p:sp>
-        <p:nvSpPr>
-          <p:cNvPr id="9" name="TextBox 8"/>
-          <p:cNvSpPr txBox="1"/>
-          <p:nvPr/>
-        </p:nvSpPr>
-        <p:spPr>
-          <a:xfrm>
-            <a:off x="749808" y="2011680"/>
-            <a:ext cx="4023360" cy="256032"/>
-          </a:xfrm>
-          <a:prstGeom prst="rect">
-            <a:avLst/>
-          </a:prstGeom>
-          <a:noFill/>
-        </p:spPr>
-        <p:txBody>
-          <a:bodyPr wrap="square" anchor="t">
-            <a:spAutoFit/>
-          </a:bodyPr>
-          <a:lstStyle/>
-          <a:p>
-            <a:pPr algn="l"/>
+          <a:p>
+            <a:pPr algn="l">
+              <a:spcBef>
+                <a:spcPts val="0"/>
+              </a:spcBef>
+              <a:spcAft>
+                <a:spcPts val="200"/>
+              </a:spcAft>
+            </a:pPr>
             <a:r>
               <a:rPr sz="1200" b="1">
                 <a:solidFill>
@@ -6760,66 +6384,37 @@
               <a:t>What appears on screen</a:t>
             </a:r>
           </a:p>
-        </p:txBody>
-      </p:sp>
-      <p:sp>
-        <p:nvSpPr>
-          <p:cNvPr id="10" name="TextBox 9"/>
-          <p:cNvSpPr txBox="1"/>
-          <p:nvPr/>
-        </p:nvSpPr>
-        <p:spPr>
-          <a:xfrm>
-            <a:off x="749808" y="2267712"/>
-            <a:ext cx="3931920" cy="713232"/>
-          </a:xfrm>
-          <a:prstGeom prst="rect">
-            <a:avLst/>
-          </a:prstGeom>
-          <a:noFill/>
-        </p:spPr>
-        <p:txBody>
-          <a:bodyPr wrap="square" anchor="t">
-            <a:spAutoFit/>
-          </a:bodyPr>
-          <a:lstStyle/>
-          <a:p>
-            <a:pPr algn="l"/>
-            <a:r>
-              <a:rPr sz="1600" b="0">
+          <a:p>
+            <a:pPr algn="l">
+              <a:lnSpc>
+                <a:spcPct val="110000"/>
+              </a:lnSpc>
+              <a:spcBef>
+                <a:spcPts val="0"/>
+              </a:spcBef>
+              <a:spcAft>
+                <a:spcPts val="800"/>
+              </a:spcAft>
+            </a:pPr>
+            <a:r>
+              <a:rPr sz="1300">
                 <a:solidFill>
                   <a:srgbClr val="102A43"/>
                 </a:solidFill>
                 <a:latin typeface="Aptos"/>
               </a:rPr>
-              <a:t>A report page designed for operational review and export, not just on-screen viewing.</a:t>
-            </a:r>
-          </a:p>
-        </p:txBody>
-      </p:sp>
-      <p:sp>
-        <p:nvSpPr>
-          <p:cNvPr id="11" name="TextBox 10"/>
-          <p:cNvSpPr txBox="1"/>
-          <p:nvPr/>
-        </p:nvSpPr>
-        <p:spPr>
-          <a:xfrm>
-            <a:off x="749808" y="3063240"/>
-            <a:ext cx="4023360" cy="256032"/>
-          </a:xfrm>
-          <a:prstGeom prst="rect">
-            <a:avLst/>
-          </a:prstGeom>
-          <a:noFill/>
-        </p:spPr>
-        <p:txBody>
-          <a:bodyPr wrap="square" anchor="t">
-            <a:spAutoFit/>
-          </a:bodyPr>
-          <a:lstStyle/>
-          <a:p>
-            <a:pPr algn="l"/>
+              <a:t>The same report page with a dedicated `Download CSV` button positioned alongside the `Reset` control at the top of the dashboard.</a:t>
+            </a:r>
+          </a:p>
+          <a:p>
+            <a:pPr algn="l">
+              <a:spcBef>
+                <a:spcPts val="0"/>
+              </a:spcBef>
+              <a:spcAft>
+                <a:spcPts val="200"/>
+              </a:spcAft>
+            </a:pPr>
             <a:r>
               <a:rPr sz="1200" b="1">
                 <a:solidFill>
@@ -6830,33 +6425,20 @@
               <a:t>Why it matters</a:t>
             </a:r>
           </a:p>
-        </p:txBody>
-      </p:sp>
-      <p:sp>
-        <p:nvSpPr>
-          <p:cNvPr id="12" name="TextBox 11"/>
-          <p:cNvSpPr txBox="1"/>
-          <p:nvPr/>
-        </p:nvSpPr>
-        <p:spPr>
-          <a:xfrm>
-            <a:off x="749808" y="3319272"/>
-            <a:ext cx="3931920" cy="640080"/>
-          </a:xfrm>
-          <a:prstGeom prst="rect">
-            <a:avLst/>
-          </a:prstGeom>
-          <a:noFill/>
-        </p:spPr>
-        <p:txBody>
-          <a:bodyPr wrap="square" anchor="t">
-            <a:spAutoFit/>
-          </a:bodyPr>
-          <a:lstStyle/>
-          <a:p>
-            <a:pPr algn="l"/>
-            <a:r>
-              <a:rPr sz="1500" b="0">
+          <a:p>
+            <a:pPr algn="l">
+              <a:lnSpc>
+                <a:spcPct val="110000"/>
+              </a:lnSpc>
+              <a:spcBef>
+                <a:spcPts val="0"/>
+              </a:spcBef>
+              <a:spcAft>
+                <a:spcPts val="800"/>
+              </a:spcAft>
+            </a:pPr>
+            <a:r>
+              <a:rPr sz="1300">
                 <a:solidFill>
                   <a:srgbClr val="102A43"/>
                 </a:solidFill>
@@ -6865,31 +6447,15 @@
               <a:t>Campaign reporting often continues outside the portal in spreadsheets or BI workflows.</a:t>
             </a:r>
           </a:p>
-        </p:txBody>
-      </p:sp>
-      <p:sp>
-        <p:nvSpPr>
-          <p:cNvPr id="13" name="TextBox 12"/>
-          <p:cNvSpPr txBox="1"/>
-          <p:nvPr/>
-        </p:nvSpPr>
-        <p:spPr>
-          <a:xfrm>
-            <a:off x="749808" y="4069080"/>
-            <a:ext cx="4023360" cy="256032"/>
-          </a:xfrm>
-          <a:prstGeom prst="rect">
-            <a:avLst/>
-          </a:prstGeom>
-          <a:noFill/>
-        </p:spPr>
-        <p:txBody>
-          <a:bodyPr wrap="square" anchor="t">
-            <a:spAutoFit/>
-          </a:bodyPr>
-          <a:lstStyle/>
-          <a:p>
-            <a:pPr algn="l"/>
+          <a:p>
+            <a:pPr algn="l">
+              <a:spcBef>
+                <a:spcPts val="0"/>
+              </a:spcBef>
+              <a:spcAft>
+                <a:spcPts val="200"/>
+              </a:spcAft>
+            </a:pPr>
             <a:r>
               <a:rPr sz="1200" b="1">
                 <a:solidFill>
@@ -6900,33 +6466,20 @@
               <a:t>Expected result</a:t>
             </a:r>
           </a:p>
-        </p:txBody>
-      </p:sp>
-      <p:sp>
-        <p:nvSpPr>
-          <p:cNvPr id="14" name="TextBox 13"/>
-          <p:cNvSpPr txBox="1"/>
-          <p:nvPr/>
-        </p:nvSpPr>
-        <p:spPr>
-          <a:xfrm>
-            <a:off x="749808" y="4325112"/>
-            <a:ext cx="3931920" cy="566928"/>
-          </a:xfrm>
-          <a:prstGeom prst="rect">
-            <a:avLst/>
-          </a:prstGeom>
-          <a:noFill/>
-        </p:spPr>
-        <p:txBody>
-          <a:bodyPr wrap="square" anchor="t">
-            <a:spAutoFit/>
-          </a:bodyPr>
-          <a:lstStyle/>
-          <a:p>
-            <a:pPr algn="l"/>
-            <a:r>
-              <a:rPr sz="1500" b="0">
+          <a:p>
+            <a:pPr algn="l">
+              <a:lnSpc>
+                <a:spcPct val="110000"/>
+              </a:lnSpc>
+              <a:spcBef>
+                <a:spcPts val="0"/>
+              </a:spcBef>
+              <a:spcAft>
+                <a:spcPts val="800"/>
+              </a:spcAft>
+            </a:pPr>
+            <a:r>
+              <a:rPr sz="1300">
                 <a:solidFill>
                   <a:srgbClr val="102A43"/>
                 </a:solidFill>
@@ -6935,31 +6488,15 @@
               <a:t>The transaction view can feed a follow-up or analytics process without manual rewriting.</a:t>
             </a:r>
           </a:p>
-        </p:txBody>
-      </p:sp>
-      <p:sp>
-        <p:nvSpPr>
-          <p:cNvPr id="15" name="TextBox 14"/>
-          <p:cNvSpPr txBox="1"/>
-          <p:nvPr/>
-        </p:nvSpPr>
-        <p:spPr>
-          <a:xfrm>
-            <a:off x="749808" y="4965192"/>
-            <a:ext cx="4023360" cy="256032"/>
-          </a:xfrm>
-          <a:prstGeom prst="rect">
-            <a:avLst/>
-          </a:prstGeom>
-          <a:noFill/>
-        </p:spPr>
-        <p:txBody>
-          <a:bodyPr wrap="square" anchor="t">
-            <a:spAutoFit/>
-          </a:bodyPr>
-          <a:lstStyle/>
-          <a:p>
-            <a:pPr algn="l"/>
+          <a:p>
+            <a:pPr algn="l">
+              <a:spcBef>
+                <a:spcPts val="0"/>
+              </a:spcBef>
+              <a:spcAft>
+                <a:spcPts val="200"/>
+              </a:spcAft>
+            </a:pPr>
             <a:r>
               <a:rPr sz="1200" b="1">
                 <a:solidFill>
@@ -6970,46 +6507,33 @@
               <a:t>Trainer note</a:t>
             </a:r>
           </a:p>
-        </p:txBody>
-      </p:sp>
-      <p:sp>
-        <p:nvSpPr>
-          <p:cNvPr id="16" name="TextBox 15"/>
-          <p:cNvSpPr txBox="1"/>
-          <p:nvPr/>
-        </p:nvSpPr>
-        <p:spPr>
-          <a:xfrm>
-            <a:off x="749808" y="5212080"/>
-            <a:ext cx="3931920" cy="640080"/>
-          </a:xfrm>
-          <a:prstGeom prst="rect">
-            <a:avLst/>
-          </a:prstGeom>
-          <a:noFill/>
-        </p:spPr>
-        <p:txBody>
-          <a:bodyPr wrap="square" anchor="t">
-            <a:spAutoFit/>
-          </a:bodyPr>
-          <a:lstStyle/>
-          <a:p>
-            <a:pPr algn="l"/>
-            <a:r>
-              <a:rPr sz="1300" b="0">
+          <a:p>
+            <a:pPr algn="l">
+              <a:lnSpc>
+                <a:spcPct val="110000"/>
+              </a:lnSpc>
+              <a:spcBef>
+                <a:spcPts val="0"/>
+              </a:spcBef>
+              <a:spcAft>
+                <a:spcPts val="0"/>
+              </a:spcAft>
+            </a:pPr>
+            <a:r>
+              <a:rPr sz="1200">
                 <a:solidFill>
                   <a:srgbClr val="52667A"/>
                 </a:solidFill>
                 <a:latin typeface="Aptos"/>
               </a:rPr>
-              <a:t>Even if the deck demo does not actually export a CSV live, call out the button so users know the path exists.</a:t>
-            </a:r>
-          </a:p>
-        </p:txBody>
-      </p:sp>
-      <p:sp>
-        <p:nvSpPr>
-          <p:cNvPr id="17" name="Rounded Rectangle 16"/>
+              <a:t>The export action preserves the current collateral filter in the query string so stakeholders can take either the whole campaign dataset or a filtered asset-specific extract.</a:t>
+            </a:r>
+          </a:p>
+        </p:txBody>
+      </p:sp>
+      <p:sp>
+        <p:nvSpPr>
+          <p:cNvPr id="8" name="Rounded Rectangle 7"/>
           <p:cNvSpPr/>
           <p:nvPr/>
         </p:nvSpPr>
@@ -7054,7 +6578,7 @@
       </p:sp>
       <p:sp>
         <p:nvSpPr>
-          <p:cNvPr id="18" name="TextBox 17"/>
+          <p:cNvPr id="9" name="TextBox 8"/>
           <p:cNvSpPr txBox="1"/>
           <p:nvPr/>
         </p:nvSpPr>
@@ -7089,7 +6613,7 @@
       </p:sp>
       <p:pic>
         <p:nvPicPr>
-          <p:cNvPr id="19" name="Picture 18" descr="report-dashboard.png"/>
+          <p:cNvPr id="10" name="Picture 9" descr="report-dashboard.png"/>
           <p:cNvPicPr>
             <a:picLocks noChangeAspect="1"/>
           </p:cNvPicPr>
@@ -7113,7 +6637,7 @@
       </p:pic>
       <p:sp>
         <p:nvSpPr>
-          <p:cNvPr id="20" name="TextBox 19"/>
+          <p:cNvPr id="11" name="TextBox 10"/>
           <p:cNvSpPr txBox="1"/>
           <p:nvPr/>
         </p:nvSpPr>
@@ -7148,7 +6672,7 @@
       </p:sp>
       <p:sp>
         <p:nvSpPr>
-          <p:cNvPr id="21" name="TextBox 20"/>
+          <p:cNvPr id="12" name="TextBox 11"/>
           <p:cNvSpPr txBox="1"/>
           <p:nvPr/>
         </p:nvSpPr>
@@ -7559,7 +7083,7 @@
                 </a:solidFill>
                 <a:latin typeface="Aptos"/>
               </a:rPr>
-              <a:t>Validated against the seeded transaction dashboard on 2026-04-11.</a:t>
+              <a:t>Validated against the seeded transaction dashboard on 2026-04-23.</a:t>
             </a:r>
           </a:p>
         </p:txBody>
@@ -7853,7 +7377,7 @@
                 </a:solidFill>
                 <a:latin typeface="Aptos"/>
               </a:rPr>
-              <a:t>Validated against the seeded transaction dashboard on 2026-04-11.</a:t>
+              <a:t>Validated against the seeded transaction dashboard on 2026-04-23.</a:t>
             </a:r>
           </a:p>
         </p:txBody>
